--- a/artifacts/slides/dynamic-workflows.pptx
+++ b/artifacts/slides/dynamic-workflows.pptx
@@ -506,7 +506,7 @@
               <a:t>Dynamic Workflows: what it does, where value comes from, and the bounded control story.,Exact lifecycle: experimental. Official SDK documentation calls the API experimental. This is not GitHub Actions or a verified public-preview SKU.,Verification date: 2026-10-14. Evidence older than 30 days requires re-review.,This is independent enablement for a controlled pilot, not production certification or customer-specific approval.,Cost detail: AI credits cover the workflow subagent tree. The documented maxAiCredits ceiling is soft and post-paid, so parallel work can settle above it. Schema retries count as additional admitted subagents. No guessed runtime budget is declared in the demo extension.,Explicit assumptions:
 An execution-eligible account and compatible SDK.
 Two synthetic application inputs; no nested workflows.
-Presenter chooses an approved per-run limit; limits are not an enterprise billing hard stop.,Complete assessment: https://github.com/hammadorg93/copilot-runway/blob/main/features/dynamic-workflows/assessment.md,Presenter runbook: https://github.com/hammadorg93/copilot-runway/blob/main/demos/dynamic-workflows/README.md,Kit validation: kit-tested. Live feature validation: not-run.,Remote cleanup: Cancel any active workflow by its exact run ID. Reset only local fixture files; retained workflow journals are separate state.,Primary sources:
+Presenter chooses an approved per-run limit; limits are not an enterprise billing hard stop.,Complete assessment: https://github.com/aj-enns/copilot-runway/blob/main/features/dynamic-workflows/assessment.md,Presenter runbook: https://github.com/aj-enns/copilot-runway/blob/main/demos/dynamic-workflows/README.md,Kit validation: kit-tested. Live feature validation: not-run.,Remote cleanup: Cancel any active workflow by its exact run ID. Reset only local fixture files; retained workflow journals are separate state.,Primary sources:
 Copilot SDK: Dynamic Workflows (experimental API): https://github.com/github/copilot-sdk/blob/ad20f9f4319d48000b895c9c4180242c2232e1ab/nodejs/docs/workflows.md
 Usage-based billing for organizations and enterprises: https://docs.github.com/en/copilot/concepts/billing-and-usage/organizations-and-enterprises/billing
 GitHub custom agents configuration and tool restrictions: https://docs.github.com/en/copilot/reference/custom-agents-configuration
@@ -602,7 +602,7 @@
               <a:t>Dynamic Workflows: pilot decision, evidence gaps, cost assumptions, and how to start the repeatable demo kit.,Exact lifecycle: experimental. Official SDK documentation calls the API experimental. This is not GitHub Actions or a verified public-preview SKU.,Verification date: 2026-10-14. Evidence older than 30 days requires re-review.,This is independent enablement for a controlled pilot, not production certification or customer-specific approval.,Cost detail: AI credits cover the workflow subagent tree. The documented maxAiCredits ceiling is soft and post-paid, so parallel work can settle above it. Schema retries count as additional admitted subagents. No guessed runtime budget is declared in the demo extension.,Explicit assumptions:
 An execution-eligible account and compatible SDK.
 Two synthetic application inputs; no nested workflows.
-Presenter chooses an approved per-run limit; limits are not an enterprise billing hard stop.,Complete assessment: https://github.com/hammadorg93/copilot-runway/blob/main/features/dynamic-workflows/assessment.md,Presenter runbook: https://github.com/hammadorg93/copilot-runway/blob/main/demos/dynamic-workflows/README.md,Kit validation: kit-tested. Live feature validation: not-run.,Remote cleanup: Cancel any active workflow by its exact run ID. Reset only local fixture files; retained workflow journals are separate state.,Primary sources:
+Presenter chooses an approved per-run limit; limits are not an enterprise billing hard stop.,Complete assessment: https://github.com/aj-enns/copilot-runway/blob/main/features/dynamic-workflows/assessment.md,Presenter runbook: https://github.com/aj-enns/copilot-runway/blob/main/demos/dynamic-workflows/README.md,Kit validation: kit-tested. Live feature validation: not-run.,Remote cleanup: Cancel any active workflow by its exact run ID. Reset only local fixture files; retained workflow journals are separate state.,Primary sources:
 Copilot SDK: Dynamic Workflows (experimental API): https://github.com/github/copilot-sdk/blob/ad20f9f4319d48000b895c9c4180242c2232e1ab/nodejs/docs/workflows.md
 Usage-based billing for organizations and enterprises: https://docs.github.com/en/copilot/concepts/billing-and-usage/organizations-and-enterprises/billing
 GitHub custom agents configuration and tool restrictions: https://docs.github.com/en/copilot/reference/custom-agents-configuration
